--- a/public/fun/pack/pptx/familypro/가족소개프리미엄_30_반려동물과함께_임페리얼퍼플.pptx
+++ b/public/fun/pack/pptx/familypro/가족소개프리미엄_30_반려동물과함께_임페리얼퍼플.pptx
@@ -113,12 +113,12 @@
   <p:extLst>
     <p:ext uri="{521415D9-36F7-43E2-AB2F-B90AF26B5E84}">
       <p14:sectionLst xmlns:p14="http://schemas.microsoft.com/office/powerpoint/2010/main">
-        <p14:section name="시작" id="{AA0FA41E-FEA5-4F48-BDD4-D7B4734A25CA}">
+        <p14:section name="시작" id="{BB2A99F7-70DD-42D6-A8A2-965D70D67829}">
           <p14:sldIdLst>
             <p14:sldId id="256"/>
           </p14:sldIdLst>
         </p14:section>
-        <p14:section name="본문" id="{2B2A683A-5E4D-4ECE-80A9-785CF8C9B3BE}">
+        <p14:section name="본문" id="{A6694494-0F71-43BE-923A-176D1351DC16}">
           <p14:sldIdLst>
             <p14:sldId id="257"/>
             <p14:sldId id="258"/>
@@ -127,7 +127,7 @@
             <p14:sldId id="261"/>
           </p14:sldIdLst>
         </p14:section>
-        <p14:section name="마무리" id="{BDC5CBC6-F052-40BE-8BC0-5B47855DB4FD}">
+        <p14:section name="마무리" id="{96475F49-2BF9-4903-A322-F7A1BD0E9A56}">
           <p14:sldIdLst>
             <p14:sldId id="262"/>
           </p14:sldIdLst>
@@ -1901,7 +1901,7 @@
             </a:lvl1pPr>
           </a:lstStyle>
           <a:p>
-            <a:fld id="{47A1A164-F63F-466D-BD79-8462FCF76E09}" type="slidenum">
+            <a:fld id="{B416F348-A61B-4884-866D-379ABE0CF269}" type="slidenum">
               <a:rPr lang="en-US"/>
               <a:t>‹#›</a:t>
             </a:fld>
@@ -3023,7 +3023,7 @@
             </a:lvl1pPr>
           </a:lstStyle>
           <a:p>
-            <a:fld id="{F7B853EE-BFCB-47C0-8556-F3D8BD8BEA56}" type="slidenum">
+            <a:fld id="{99E067B8-9E3F-4EAA-9EA2-0A1B40F51226}" type="slidenum">
               <a:rPr lang="en-US"/>
               <a:t>‹#›</a:t>
             </a:fld>
@@ -3764,7 +3764,7 @@
             </a:lvl1pPr>
           </a:lstStyle>
           <a:p>
-            <a:fld id="{D2B5A16B-3608-447C-AF3A-88F7A8AA9AE7}" type="slidenum">
+            <a:fld id="{D7F895DE-9DEC-4B84-8DD0-DE7A1E4D89F8}" type="slidenum">
               <a:rPr lang="en-US"/>
               <a:t>‹#›</a:t>
             </a:fld>
@@ -4649,7 +4649,7 @@
           <a:p>
             <a:r>
               <a:rPr lang="ko-KR"/>
-              <a:t>반려동물과 함께 · 0000. 00. 00</a:t>
+              <a:t>반려동물과 함께 · 날짜 입력</a:t>
             </a:r>
           </a:p>
         </p:txBody>
@@ -4960,7 +4960,7 @@
           <a:bodyPr/>
           <a:lstStyle/>
           <a:p>
-            <a:fld id="{E025F1CA-025B-490C-8834-5C5B2E450A44}" type="slidenum">
+            <a:fld id="{CB12105A-FBA3-45A3-9211-2E5CE75A1210}" type="slidenum">
               <a:rPr lang="en-US"/>
               <a:t>‹#›</a:t>
             </a:fld>
@@ -5538,7 +5538,7 @@
           <a:bodyPr/>
           <a:lstStyle/>
           <a:p>
-            <a:fld id="{41D3E690-BEC1-4ED9-B7B2-E8B05B5982A2}" type="slidenum">
+            <a:fld id="{2298251A-32C0-43D4-9878-74D349EB3F20}" type="slidenum">
               <a:rPr lang="en-US"/>
               <a:t>‹#›</a:t>
             </a:fld>
@@ -6535,7 +6535,7 @@
           <a:bodyPr/>
           <a:lstStyle/>
           <a:p>
-            <a:fld id="{D36CC5E1-7ACA-42C8-885A-4F284ADA120F}" type="slidenum">
+            <a:fld id="{77276152-B104-4BEB-AD59-1BC3B2C6E2A2}" type="slidenum">
               <a:rPr lang="en-US"/>
               <a:t>‹#›</a:t>
             </a:fld>
@@ -7842,7 +7842,7 @@
           <a:bodyPr/>
           <a:lstStyle/>
           <a:p>
-            <a:fld id="{8237CD69-D35F-46F8-A33D-5416830E3692}" type="slidenum">
+            <a:fld id="{9F16EFFB-E061-4E52-BA63-7E00238B14EE}" type="slidenum">
               <a:rPr lang="en-US"/>
               <a:t>‹#›</a:t>
             </a:fld>
@@ -7952,7 +7952,7 @@
           <a:bodyPr/>
           <a:lstStyle/>
           <a:p>
-            <a:fld id="{7062CBBF-FE96-4D70-B87D-86C16A536381}" type="slidenum">
+            <a:fld id="{B1491B7F-2403-4235-86A2-3BC79C127F61}" type="slidenum">
               <a:rPr lang="en-US"/>
               <a:t>‹#›</a:t>
             </a:fld>
